--- a/media/exports/reports/2026-08/people-helped.pptx
+++ b/media/exports/reports/2026-08/people-helped.pptx
@@ -180,7 +180,7 @@
             <c:idx val="4"/>
             <c:spPr>
               <a:solidFill>
-                <a:srgbClr val="7D8790"/>
+                <a:srgbClr val="0E9F6E"/>
               </a:solidFill>
             </c:spPr>
           </c:dPt>
@@ -190,16 +190,16 @@
               <c:strCache>
                 <c:ptCount val="5"/>
                 <c:pt idx="0">
-                  <c:v>Housing support</c:v>
+                  <c:v>Mental health first aid</c:v>
                 </c:pt>
                 <c:pt idx="1">
-                  <c:v>Mental health first aid</c:v>
+                  <c:v>Youth outreach</c:v>
                 </c:pt>
                 <c:pt idx="2">
-                  <c:v>Youth outreach</c:v>
+                  <c:v>Community meals</c:v>
                 </c:pt>
                 <c:pt idx="3">
-                  <c:v>Community meals</c:v>
+                  <c:v>Housing support</c:v>
                 </c:pt>
                 <c:pt idx="4">
                   <c:v>Digital literacy</c:v>
@@ -214,19 +214,19 @@
                 <c:formatCode>0.0"%";[Red](0.0"%")</c:formatCode>
                 <c:ptCount val="5"/>
                 <c:pt idx="0">
-                  <c:v>80.3</c:v>
+                  <c:v>78.8</c:v>
                 </c:pt>
                 <c:pt idx="1">
-                  <c:v>80.7</c:v>
+                  <c:v>83.5</c:v>
                 </c:pt>
                 <c:pt idx="2">
-                  <c:v>81.7</c:v>
+                  <c:v>85.7</c:v>
                 </c:pt>
                 <c:pt idx="3">
-                  <c:v>82.7</c:v>
+                  <c:v>86.7</c:v>
                 </c:pt>
                 <c:pt idx="4">
-                  <c:v>88.7</c:v>
+                  <c:v>90.2</c:v>
                 </c:pt>
               </c:numCache>
             </c:numRef>
@@ -290,7 +290,7 @@
       <c:valAx>
         <c:axId val="-2113994440"/>
         <c:scaling>
-          <c:max val="103.49999999999999"/>
+          <c:max val="103.72999999999999"/>
           <c:min val="0.0"/>
         </c:scaling>
         <c:delete/>
@@ -1093,7 +1093,7 @@
           <a:lstStyle/>
           <a:p>
             <a:r>
-              <a:t>How many people did we help this month, and how many couldn't we reach?. People helped, August: 522; Couldn't reach, August: 112; Share reached, August: 82.3%. 522 people were helped in August, and 112 came to a program but couldn't be helped: 82.3% reached (target 90.0%), against 83.7% in July. Housing support reached the smallest share: 80.3% (24 couldn't be helped). The main reason: program at capacity (50 people).</a:t>
+              <a:t>How many people did we help this month, and how many couldn't we reach?. People helped, August: 522; Couldn't reach, August: 93; Share reached, August: 84.9%. 522 people were helped in August, and 93 came to a program but couldn't be helped: 84.9% reached (target 90.0%), against 84.1% in July. Mental health first aid reached the smallest share: 78.8% (18 couldn't be helped). The main reason: program at capacity (29 people).</a:t>
             </a:r>
           </a:p>
         </p:txBody>
@@ -4648,7 +4648,7 @@
                 </a:solidFill>
                 <a:latin typeface="Roboto"/>
               </a:rPr>
-              <a:t>Data retrieved 2pm, Tue 6 Oct 2026 · Generated 8 Oct 2026, 6:29pm · Sample data · Made with Python (python-pptx)</a:t>
+              <a:t>Data retrieved 2pm, Tue 6 Oct 2026 · Generated 8 Oct 2026, 11:41pm · Sample data · Made with Python (python-pptx)</a:t>
             </a:r>
           </a:p>
         </p:txBody>
@@ -5160,7 +5160,7 @@
                 </a:solidFill>
                 <a:latin typeface="Roboto"/>
               </a:rPr>
-              <a:t>112</a:t>
+              <a:t>93</a:t>
             </a:r>
           </a:p>
         </p:txBody>
@@ -5199,7 +5199,7 @@
                 </a:solidFill>
                 <a:latin typeface="Roboto"/>
               </a:rPr>
-              <a:t>July 97</a:t>
+              <a:t>July 94</a:t>
             </a:r>
           </a:p>
         </p:txBody>
@@ -5326,7 +5326,7 @@
                 </a:solidFill>
                 <a:latin typeface="Roboto"/>
               </a:rPr>
-              <a:t>82.3%</a:t>
+              <a:t>84.9%</a:t>
             </a:r>
           </a:p>
         </p:txBody>
@@ -5396,7 +5396,7 @@
         </p:nvCxnSpPr>
         <p:spPr>
           <a:xfrm>
-            <a:off x="9528067" y="2620868"/>
+            <a:off x="9515456" y="2620868"/>
             <a:ext cx="0" cy="2267834"/>
           </a:xfrm>
           <a:prstGeom prst="line">
@@ -5432,7 +5432,7 @@
         </p:nvSpPr>
         <p:spPr>
           <a:xfrm>
-            <a:off x="8430787" y="4888702"/>
+            <a:off x="8418176" y="4888702"/>
             <a:ext cx="2194560" cy="237744"/>
           </a:xfrm>
           <a:prstGeom prst="rect">
@@ -5585,7 +5585,7 @@
                 </a:solidFill>
                 <a:latin typeface="Roboto"/>
               </a:rPr>
-              <a:t>522 people were helped in August, and 112 came to a program but couldn't be helped: 82.3% reached (target 90.0%), against 83.7% in July.</a:t>
+              <a:t>522 people were helped in August, and 93 came to a program but couldn't be helped: 84.9% reached (target 90.0%), against 84.1% in July.</a:t>
             </a:r>
           </a:p>
         </p:txBody>
@@ -5712,7 +5712,7 @@
                 </a:solidFill>
                 <a:latin typeface="Roboto"/>
               </a:rPr>
-              <a:t>Housing support reached the smallest share: 80.3% (24 couldn't be helped). The main reason: program at capacity (50 people).</a:t>
+              <a:t>Mental health first aid reached the smallest share: 78.8% (18 couldn't be helped). The main reason: program at capacity (29 people).</a:t>
             </a:r>
           </a:p>
         </p:txBody>
@@ -5790,7 +5790,7 @@
                 </a:solidFill>
                 <a:latin typeface="Roboto"/>
               </a:rPr>
-              <a:t>Data retrieved 2pm, Tue 6 Oct 2026 · Generated 8 Oct 2026, 6:29pm · Sample data · Made with Python (python-pptx)</a:t>
+              <a:t>Data retrieved 2pm, Tue 6 Oct 2026 · Generated 8 Oct 2026, 11:41pm · Sample data · Made with Python (python-pptx)</a:t>
             </a:r>
           </a:p>
         </p:txBody>
@@ -6105,7 +6105,7 @@
                 </a:solidFill>
                 <a:latin typeface="Roboto"/>
               </a:rPr>
-              <a:t>Data retrieved 2pm, Tue 6 Oct 2026 · Generated 8 Oct 2026, 6:29pm · Sample data · Made with Python (python-pptx)</a:t>
+              <a:t>Data retrieved 2pm, Tue 6 Oct 2026 · Generated 8 Oct 2026, 11:41pm · Sample data · Made with Python (python-pptx)</a:t>
             </a:r>
           </a:p>
         </p:txBody>
@@ -6413,7 +6413,7 @@
                           </a:solidFill>
                           <a:latin typeface="Roboto"/>
                         </a:rPr>
-                        <a:t>50</a:t>
+                        <a:t>29</a:t>
                       </a:r>
                     </a:p>
                   </a:txBody>
@@ -6469,119 +6469,7 @@
                           </a:solidFill>
                           <a:latin typeface="Roboto"/>
                         </a:rPr>
-                        <a:t>28</a:t>
-                      </a:r>
-                    </a:p>
-                  </a:txBody>
-                  <a:tcPr>
-                    <a:solidFill>
-                      <a:srgbClr val="F7FAF7"/>
-                    </a:solidFill>
-                  </a:tcPr>
-                </a:tc>
-              </a:tr>
-              <a:tr h="310896">
-                <a:tc>
-                  <a:txBody>
-                    <a:bodyPr/>
-                    <a:lstStyle/>
-                    <a:p>
-                      <a:pPr algn="l">
-                        <a:defRPr>
-                          <a:latin typeface="Roboto"/>
-                        </a:defRPr>
-                      </a:pPr>
-                      <a:r>
-                        <a:rPr sz="1050">
-                          <a:solidFill>
-                            <a:srgbClr val="25342A"/>
-                          </a:solidFill>
-                          <a:latin typeface="Roboto"/>
-                        </a:rPr>
-                        <a:t>Outside the service area</a:t>
-                      </a:r>
-                    </a:p>
-                  </a:txBody>
-                  <a:tcPr>
-                    <a:solidFill>
-                      <a:srgbClr val="FFFFFF"/>
-                    </a:solidFill>
-                  </a:tcPr>
-                </a:tc>
-                <a:tc>
-                  <a:txBody>
-                    <a:bodyPr/>
-                    <a:lstStyle/>
-                    <a:p>
-                      <a:pPr algn="r">
-                        <a:defRPr>
-                          <a:latin typeface="Roboto"/>
-                        </a:defRPr>
-                      </a:pPr>
-                      <a:r>
-                        <a:rPr sz="1050">
-                          <a:solidFill>
-                            <a:srgbClr val="25342A"/>
-                          </a:solidFill>
-                          <a:latin typeface="Roboto"/>
-                        </a:rPr>
-                        <a:t>13</a:t>
-                      </a:r>
-                    </a:p>
-                  </a:txBody>
-                  <a:tcPr>
-                    <a:solidFill>
-                      <a:srgbClr val="FFFFFF"/>
-                    </a:solidFill>
-                  </a:tcPr>
-                </a:tc>
-              </a:tr>
-              <a:tr h="310896">
-                <a:tc>
-                  <a:txBody>
-                    <a:bodyPr/>
-                    <a:lstStyle/>
-                    <a:p>
-                      <a:pPr algn="l">
-                        <a:defRPr>
-                          <a:latin typeface="Roboto"/>
-                        </a:defRPr>
-                      </a:pPr>
-                      <a:r>
-                        <a:rPr sz="1050">
-                          <a:solidFill>
-                            <a:srgbClr val="25342A"/>
-                          </a:solidFill>
-                          <a:latin typeface="Roboto"/>
-                        </a:rPr>
-                        <a:t>Not eligible</a:t>
-                      </a:r>
-                    </a:p>
-                  </a:txBody>
-                  <a:tcPr>
-                    <a:solidFill>
-                      <a:srgbClr val="F7FAF7"/>
-                    </a:solidFill>
-                  </a:tcPr>
-                </a:tc>
-                <a:tc>
-                  <a:txBody>
-                    <a:bodyPr/>
-                    <a:lstStyle/>
-                    <a:p>
-                      <a:pPr algn="r">
-                        <a:defRPr>
-                          <a:latin typeface="Roboto"/>
-                        </a:defRPr>
-                      </a:pPr>
-                      <a:r>
-                        <a:rPr sz="1050">
-                          <a:solidFill>
-                            <a:srgbClr val="25342A"/>
-                          </a:solidFill>
-                          <a:latin typeface="Roboto"/>
-                        </a:rPr>
-                        <a:t>11</a:t>
+                        <a:t>27</a:t>
                       </a:r>
                     </a:p>
                   </a:txBody>
@@ -6637,7 +6525,119 @@
                           </a:solidFill>
                           <a:latin typeface="Roboto"/>
                         </a:rPr>
-                        <a:t>10</a:t>
+                        <a:t>14</a:t>
+                      </a:r>
+                    </a:p>
+                  </a:txBody>
+                  <a:tcPr>
+                    <a:solidFill>
+                      <a:srgbClr val="FFFFFF"/>
+                    </a:solidFill>
+                  </a:tcPr>
+                </a:tc>
+              </a:tr>
+              <a:tr h="310896">
+                <a:tc>
+                  <a:txBody>
+                    <a:bodyPr/>
+                    <a:lstStyle/>
+                    <a:p>
+                      <a:pPr algn="l">
+                        <a:defRPr>
+                          <a:latin typeface="Roboto"/>
+                        </a:defRPr>
+                      </a:pPr>
+                      <a:r>
+                        <a:rPr sz="1050">
+                          <a:solidFill>
+                            <a:srgbClr val="25342A"/>
+                          </a:solidFill>
+                          <a:latin typeface="Roboto"/>
+                        </a:rPr>
+                        <a:t>Outside the service area</a:t>
+                      </a:r>
+                    </a:p>
+                  </a:txBody>
+                  <a:tcPr>
+                    <a:solidFill>
+                      <a:srgbClr val="F7FAF7"/>
+                    </a:solidFill>
+                  </a:tcPr>
+                </a:tc>
+                <a:tc>
+                  <a:txBody>
+                    <a:bodyPr/>
+                    <a:lstStyle/>
+                    <a:p>
+                      <a:pPr algn="r">
+                        <a:defRPr>
+                          <a:latin typeface="Roboto"/>
+                        </a:defRPr>
+                      </a:pPr>
+                      <a:r>
+                        <a:rPr sz="1050">
+                          <a:solidFill>
+                            <a:srgbClr val="25342A"/>
+                          </a:solidFill>
+                          <a:latin typeface="Roboto"/>
+                        </a:rPr>
+                        <a:t>14</a:t>
+                      </a:r>
+                    </a:p>
+                  </a:txBody>
+                  <a:tcPr>
+                    <a:solidFill>
+                      <a:srgbClr val="F7FAF7"/>
+                    </a:solidFill>
+                  </a:tcPr>
+                </a:tc>
+              </a:tr>
+              <a:tr h="310896">
+                <a:tc>
+                  <a:txBody>
+                    <a:bodyPr/>
+                    <a:lstStyle/>
+                    <a:p>
+                      <a:pPr algn="l">
+                        <a:defRPr>
+                          <a:latin typeface="Roboto"/>
+                        </a:defRPr>
+                      </a:pPr>
+                      <a:r>
+                        <a:rPr sz="1050">
+                          <a:solidFill>
+                            <a:srgbClr val="25342A"/>
+                          </a:solidFill>
+                          <a:latin typeface="Roboto"/>
+                        </a:rPr>
+                        <a:t>Not eligible</a:t>
+                      </a:r>
+                    </a:p>
+                  </a:txBody>
+                  <a:tcPr>
+                    <a:solidFill>
+                      <a:srgbClr val="FFFFFF"/>
+                    </a:solidFill>
+                  </a:tcPr>
+                </a:tc>
+                <a:tc>
+                  <a:txBody>
+                    <a:bodyPr/>
+                    <a:lstStyle/>
+                    <a:p>
+                      <a:pPr algn="r">
+                        <a:defRPr>
+                          <a:latin typeface="Roboto"/>
+                        </a:defRPr>
+                      </a:pPr>
+                      <a:r>
+                        <a:rPr sz="1050">
+                          <a:solidFill>
+                            <a:srgbClr val="25342A"/>
+                          </a:solidFill>
+                          <a:latin typeface="Roboto"/>
+                        </a:rPr>
+                        <a:t>9</a:t>
                       </a:r>
                     </a:p>
                   </a:txBody>
@@ -6725,7 +6725,7 @@
                 </a:solidFill>
                 <a:latin typeface="Roboto"/>
               </a:rPr>
-              <a:t>Data retrieved 2pm, Tue 6 Oct 2026 · Generated 8 Oct 2026, 6:29pm · Sample data · Made with Python (python-pptx)</a:t>
+              <a:t>Data retrieved 2pm, Tue 6 Oct 2026 · Generated 8 Oct 2026, 11:41pm · Sample data · Made with Python (python-pptx)</a:t>
             </a:r>
           </a:p>
         </p:txBody>

--- a/media/exports/reports/2026-08/people-helped.pptx
+++ b/media/exports/reports/2026-08/people-helped.pptx
@@ -1023,7 +1023,7 @@
           <a:lstStyle/>
           <a:p>
             <a:r>
-              <a:t>How many people did we help this month, and how many couldn't we reach?. Sample Community Services Ltd. Period: August 2026. People helped by each program, day by day, and the people who came to a program but couldn't be helped (and why). People helped are counted against each program's own grant spend.</a:t>
+              <a:t>How many people did we help this month, and how many couldn't we reach?. Sample Community Services Ltd. Period: August 2026. In short: 522 people helped in August; 93 couldn't be reached (84.9% reached, target 90.0%). People helped by each program, day by day, and the people who came to a program but couldn't be helped (and why). People helped are counted against each program's own grant spend.</a:t>
             </a:r>
           </a:p>
         </p:txBody>
@@ -4458,7 +4458,7 @@
         <p:spPr>
           <a:xfrm>
             <a:off x="457200" y="3703320"/>
-            <a:ext cx="11277295" cy="535940"/>
+            <a:ext cx="11277295" cy="758190"/>
           </a:xfrm>
           <a:prstGeom prst="rect">
             <a:avLst/>
@@ -4483,7 +4483,7 @@
                 </a:solidFill>
                 <a:latin typeface="Roboto"/>
               </a:rPr>
-              <a:t>Period: August 2026. People helped by each program, day by day, and the people who came to a program but couldn't be helped (and why). People helped are counted against each program's own grant spend.</a:t>
+              <a:t>Period: August 2026. In short: 522 people helped in August; 93 couldn't be reached (84.9% reached, target 90.0%). People helped by each program, day by day, and the people who came to a program but couldn't be helped (and why). People helped are counted against each program's own grant spend.</a:t>
             </a:r>
           </a:p>
         </p:txBody>
@@ -4496,7 +4496,7 @@
         </p:nvSpPr>
         <p:spPr>
           <a:xfrm>
-            <a:off x="457200" y="4330700"/>
+            <a:off x="457200" y="4552950"/>
             <a:ext cx="11277295" cy="1097280"/>
           </a:xfrm>
           <a:prstGeom prst="rect">
@@ -4648,7 +4648,7 @@
                 </a:solidFill>
                 <a:latin typeface="Roboto"/>
               </a:rPr>
-              <a:t>Data retrieved 2pm, Tue 6 Oct 2026 · Generated 8 Oct 2026, 11:41pm · Sample data · Made with Python (python-pptx)</a:t>
+              <a:t>Data retrieved 2pm, Tue 6 Oct 2026 · Generated 10 Oct 2026, 9:55pm · Sample data · Made with Python (python-pptx)</a:t>
             </a:r>
           </a:p>
         </p:txBody>
@@ -5790,7 +5790,7 @@
                 </a:solidFill>
                 <a:latin typeface="Roboto"/>
               </a:rPr>
-              <a:t>Data retrieved 2pm, Tue 6 Oct 2026 · Generated 8 Oct 2026, 11:41pm · Sample data · Made with Python (python-pptx)</a:t>
+              <a:t>Data retrieved 2pm, Tue 6 Oct 2026 · Generated 10 Oct 2026, 9:55pm · Sample data · Made with Python (python-pptx)</a:t>
             </a:r>
           </a:p>
         </p:txBody>
@@ -6105,7 +6105,7 @@
                 </a:solidFill>
                 <a:latin typeface="Roboto"/>
               </a:rPr>
-              <a:t>Data retrieved 2pm, Tue 6 Oct 2026 · Generated 8 Oct 2026, 11:41pm · Sample data · Made with Python (python-pptx)</a:t>
+              <a:t>Data retrieved 2pm, Tue 6 Oct 2026 · Generated 10 Oct 2026, 9:55pm · Sample data · Made with Python (python-pptx)</a:t>
             </a:r>
           </a:p>
         </p:txBody>
@@ -6725,7 +6725,7 @@
                 </a:solidFill>
                 <a:latin typeface="Roboto"/>
               </a:rPr>
-              <a:t>Data retrieved 2pm, Tue 6 Oct 2026 · Generated 8 Oct 2026, 11:41pm · Sample data · Made with Python (python-pptx)</a:t>
+              <a:t>Data retrieved 2pm, Tue 6 Oct 2026 · Generated 10 Oct 2026, 9:55pm · Sample data · Made with Python (python-pptx)</a:t>
             </a:r>
           </a:p>
         </p:txBody>
